--- a/public/fun/pack/pptx/birthdaypro/돌잔치프리미엄_10_첫번째이야기중심_올리브샴페인.pptx
+++ b/public/fun/pack/pptx/birthdaypro/돌잔치프리미엄_10_첫번째이야기중심_올리브샴페인.pptx
@@ -112,12 +112,12 @@
   <p:extLst>
     <p:ext uri="{521415D9-36F7-43E2-AB2F-B90AF26B5E84}">
       <p14:sectionLst xmlns:p14="http://schemas.microsoft.com/office/powerpoint/2010/main">
-        <p14:section name="시작" id="{AB3241D9-B21E-40EB-8AF2-169B3DCD3F8A}">
+        <p14:section name="시작" id="{893CD008-E745-4416-9ED7-7B5387D91EEA}">
           <p14:sldIdLst>
             <p14:sldId id="256"/>
           </p14:sldIdLst>
         </p14:section>
-        <p14:section name="본문" id="{255D06C8-6C28-47D8-8705-6C17D64479B4}">
+        <p14:section name="본문" id="{9676FB35-4E20-46A1-A26F-4DBA5D525644}">
           <p14:sldIdLst>
             <p14:sldId id="257"/>
             <p14:sldId id="258"/>
@@ -125,7 +125,7 @@
             <p14:sldId id="260"/>
           </p14:sldIdLst>
         </p14:section>
-        <p14:section name="마무리" id="{B5CBA926-A065-448B-8F77-8892C52EC39B}">
+        <p14:section name="마무리" id="{3750ECA4-4CAF-4935-8E9A-33AFA5CB7CFF}">
           <p14:sldIdLst>
             <p14:sldId id="261"/>
           </p14:sldIdLst>
@@ -1466,7 +1466,7 @@
             </a:lvl1pPr>
           </a:lstStyle>
           <a:p>
-            <a:fld id="{F80EDA2F-4AB3-4C4E-856B-498EFB53E580}" type="slidenum">
+            <a:fld id="{60CE6222-1AD2-4E0C-95B0-E7FC74353A2B}" type="slidenum">
               <a:rPr lang="en-US"/>
               <a:t>‹#›</a:t>
             </a:fld>
@@ -2208,7 +2208,7 @@
             </a:lvl1pPr>
           </a:lstStyle>
           <a:p>
-            <a:fld id="{48C08500-DDDA-4560-B092-82340B6E3881}" type="slidenum">
+            <a:fld id="{2B6E1DA0-2C47-4CB2-8BD9-B4A42049334C}" type="slidenum">
               <a:rPr lang="en-US"/>
               <a:t>‹#›</a:t>
             </a:fld>
@@ -2960,7 +2960,7 @@
             </a:lvl1pPr>
           </a:lstStyle>
           <a:p>
-            <a:fld id="{69057B69-406C-4020-9165-7579662C22AD}" type="slidenum">
+            <a:fld id="{8F09C764-B447-4ECC-B4F6-0F6D4D07BE75}" type="slidenum">
               <a:rPr lang="en-US"/>
               <a:t>‹#›</a:t>
             </a:fld>
@@ -3845,7 +3845,7 @@
           <a:p>
             <a:r>
               <a:rPr lang="ko-KR"/>
-              <a:t>아기 이름 · 0000. 00. 00</a:t>
+              <a:t>아기 이름 · 날짜 입력</a:t>
             </a:r>
           </a:p>
           <a:p>
@@ -4028,7 +4028,7 @@
           <a:bodyPr/>
           <a:lstStyle/>
           <a:p>
-            <a:fld id="{60F6A213-278E-420B-BCF7-9C3939700EDA}" type="slidenum">
+            <a:fld id="{3FC9AD95-264A-423A-9015-ADC9B48F2687}" type="slidenum">
               <a:rPr lang="en-US"/>
               <a:t>‹#›</a:t>
             </a:fld>
@@ -4650,7 +4650,7 @@
           <a:bodyPr/>
           <a:lstStyle/>
           <a:p>
-            <a:fld id="{FE6837DE-BA71-4494-BC29-F37EC242713A}" type="slidenum">
+            <a:fld id="{7F584B58-1259-418D-8928-3BAD7BC8A5B0}" type="slidenum">
               <a:rPr lang="en-US"/>
               <a:t>‹#›</a:t>
             </a:fld>
@@ -5514,7 +5514,7 @@
           <a:bodyPr/>
           <a:lstStyle/>
           <a:p>
-            <a:fld id="{FECEFDFA-F054-464D-9BF4-5B80843BD3C2}" type="slidenum">
+            <a:fld id="{F6413E00-9A52-46E1-A7E7-3B318ABC943E}" type="slidenum">
               <a:rPr lang="en-US"/>
               <a:t>‹#›</a:t>
             </a:fld>
@@ -7170,7 +7170,7 @@
           <a:bodyPr/>
           <a:lstStyle/>
           <a:p>
-            <a:fld id="{58136D53-D4F9-43BD-86A3-5D3234770732}" type="slidenum">
+            <a:fld id="{72A9D259-6C84-4F94-8251-C64983D5B5B8}" type="slidenum">
               <a:rPr lang="en-US"/>
               <a:t>‹#›</a:t>
             </a:fld>
